--- a/0_PR/01_ポートフォリオ.pptx
+++ b/0_PR/01_ポートフォリオ.pptx
@@ -5,16 +5,17 @@
     <p:sldMasterId id="2147483648" r:id="rId1"/>
   </p:sldMasterIdLst>
   <p:notesMasterIdLst>
-    <p:notesMasterId r:id="rId9"/>
+    <p:notesMasterId r:id="rId10"/>
   </p:notesMasterIdLst>
   <p:sldIdLst>
     <p:sldId id="256" r:id="rId2"/>
     <p:sldId id="257" r:id="rId3"/>
     <p:sldId id="259" r:id="rId4"/>
     <p:sldId id="265" r:id="rId5"/>
-    <p:sldId id="262" r:id="rId6"/>
-    <p:sldId id="267" r:id="rId7"/>
-    <p:sldId id="266" r:id="rId8"/>
+    <p:sldId id="269" r:id="rId6"/>
+    <p:sldId id="262" r:id="rId7"/>
+    <p:sldId id="267" r:id="rId8"/>
+    <p:sldId id="266" r:id="rId9"/>
   </p:sldIdLst>
   <p:sldSz cx="12192000" cy="6858000"/>
   <p:notesSz cx="12192000" cy="6858000"/>
@@ -124,7 +125,7 @@
           <a:p>
             <a:fld id="{C5387C26-E1C4-450F-855C-7A95B649E450}" type="datetimeFigureOut">
               <a:rPr kumimoji="1" lang="ja-JP" altLang="en-US" smtClean="0"/>
-              <a:t>2026/2/2</a:t>
+              <a:t>2026/4/30</a:t>
             </a:fld>
             <a:endParaRPr kumimoji="1" lang="ja-JP" altLang="en-US"/>
           </a:p>
@@ -498,7 +499,7 @@
           <a:p>
             <a:fld id="{73128D3D-FF30-4A8F-A1BA-CF24F881B431}" type="slidenum">
               <a:rPr kumimoji="1" lang="ja-JP" altLang="en-US" smtClean="0"/>
-              <a:t>5</a:t>
+              <a:t>6</a:t>
             </a:fld>
             <a:endParaRPr kumimoji="1" lang="ja-JP" altLang="en-US"/>
           </a:p>
@@ -616,7 +617,7 @@
           <a:p>
             <a:fld id="{73128D3D-FF30-4A8F-A1BA-CF24F881B431}" type="slidenum">
               <a:rPr kumimoji="1" lang="ja-JP" altLang="en-US" smtClean="0"/>
-              <a:t>6</a:t>
+              <a:t>7</a:t>
             </a:fld>
             <a:endParaRPr kumimoji="1" lang="ja-JP" altLang="en-US"/>
           </a:p>
@@ -786,7 +787,7 @@
           <a:p>
             <a:fld id="{1D8BD707-D9CF-40AE-B4C6-C98DA3205C09}" type="datetimeFigureOut">
               <a:rPr lang="en-US"/>
-              <a:t>2/2/2026</a:t>
+              <a:t>4/30/2026</a:t>
             </a:fld>
             <a:endParaRPr lang="en-US"/>
           </a:p>
@@ -963,7 +964,7 @@
           <a:p>
             <a:fld id="{1D8BD707-D9CF-40AE-B4C6-C98DA3205C09}" type="datetimeFigureOut">
               <a:rPr lang="en-US"/>
-              <a:t>2/2/2026</a:t>
+              <a:t>4/30/2026</a:t>
             </a:fld>
             <a:endParaRPr lang="en-US"/>
           </a:p>
@@ -1177,7 +1178,7 @@
           <a:p>
             <a:fld id="{1D8BD707-D9CF-40AE-B4C6-C98DA3205C09}" type="datetimeFigureOut">
               <a:rPr lang="en-US"/>
-              <a:t>2/2/2026</a:t>
+              <a:t>4/30/2026</a:t>
             </a:fld>
             <a:endParaRPr lang="en-US"/>
           </a:p>
@@ -1325,7 +1326,7 @@
           <a:p>
             <a:fld id="{1D8BD707-D9CF-40AE-B4C6-C98DA3205C09}" type="datetimeFigureOut">
               <a:rPr lang="en-US"/>
-              <a:t>2/2/2026</a:t>
+              <a:t>4/30/2026</a:t>
             </a:fld>
             <a:endParaRPr lang="en-US"/>
           </a:p>
@@ -1444,7 +1445,7 @@
           <a:p>
             <a:fld id="{1D8BD707-D9CF-40AE-B4C6-C98DA3205C09}" type="datetimeFigureOut">
               <a:rPr lang="en-US"/>
-              <a:t>2/2/2026</a:t>
+              <a:t>4/30/2026</a:t>
             </a:fld>
             <a:endParaRPr lang="en-US"/>
           </a:p>
@@ -1691,7 +1692,7 @@
           <a:p>
             <a:fld id="{1D8BD707-D9CF-40AE-B4C6-C98DA3205C09}" type="datetimeFigureOut">
               <a:rPr lang="en-US"/>
-              <a:t>2/2/2026</a:t>
+              <a:t>4/30/2026</a:t>
             </a:fld>
             <a:endParaRPr lang="en-US"/>
           </a:p>
@@ -2431,7 +2432,7 @@
         </p:nvGrpSpPr>
         <p:grpSpPr>
           <a:xfrm>
-            <a:off x="4724849" y="3362286"/>
+            <a:off x="5105400" y="3278583"/>
             <a:ext cx="6833419" cy="1570069"/>
             <a:chOff x="4724849" y="3362286"/>
             <a:chExt cx="6833419" cy="1570069"/>
@@ -2575,10 +2576,10 @@
         </p:nvGrpSpPr>
         <p:grpSpPr>
           <a:xfrm>
-            <a:off x="3657600" y="5189397"/>
-            <a:ext cx="8315632" cy="1088907"/>
+            <a:off x="3886200" y="5064195"/>
+            <a:ext cx="7900668" cy="1581350"/>
             <a:chOff x="3657600" y="5189397"/>
-            <a:chExt cx="8315632" cy="1088907"/>
+            <a:chExt cx="8315632" cy="1581350"/>
           </a:xfrm>
         </p:grpSpPr>
         <p:sp>
@@ -2639,7 +2640,7 @@
           <p:spPr>
             <a:xfrm>
               <a:off x="3657600" y="5693529"/>
-              <a:ext cx="8315632" cy="584775"/>
+              <a:ext cx="8315632" cy="1077218"/>
             </a:xfrm>
             <a:prstGeom prst="rect">
               <a:avLst/>
@@ -2665,20 +2666,52 @@
                 <a:t>・ </a:t>
               </a:r>
               <a:r>
-                <a:rPr kumimoji="1" lang="en-US" altLang="ja-JP" sz="3200" dirty="0">
+                <a:rPr lang="en-US" altLang="ja-JP" sz="2800" dirty="0">
                   <a:solidFill>
                     <a:schemeClr val="bg1"/>
                   </a:solidFill>
                 </a:rPr>
-                <a:t>Switch2D</a:t>
+                <a:t>Switch2D </a:t>
               </a:r>
+              <a:r>
+                <a:rPr lang="ja-JP" altLang="en-US" sz="2800" dirty="0">
+                  <a:solidFill>
+                    <a:schemeClr val="bg1"/>
+                  </a:solidFill>
+                </a:rPr>
+                <a:t>ゲーム学内コンテスト 意欲賞</a:t>
+              </a:r>
+              <a:endParaRPr lang="en-US" altLang="ja-JP" sz="2800" dirty="0">
+                <a:solidFill>
+                  <a:schemeClr val="bg1"/>
+                </a:solidFill>
+              </a:endParaRPr>
+            </a:p>
+            <a:p>
+              <a:pPr algn="l"/>
               <a:r>
                 <a:rPr kumimoji="1" lang="ja-JP" altLang="en-US" sz="3200" dirty="0">
                   <a:solidFill>
                     <a:schemeClr val="bg1"/>
                   </a:solidFill>
                 </a:rPr>
-                <a:t> ゲーム学内コンテスト　意欲賞</a:t>
+                <a:t>・ </a:t>
+              </a:r>
+              <a:r>
+                <a:rPr lang="en-US" altLang="ja-JP" sz="2800" dirty="0">
+                  <a:solidFill>
+                    <a:schemeClr val="bg1"/>
+                  </a:solidFill>
+                </a:rPr>
+                <a:t>HAL EVENT WEEK </a:t>
+              </a:r>
+              <a:r>
+                <a:rPr lang="ja-JP" altLang="en-US" sz="2800" dirty="0">
+                  <a:solidFill>
+                    <a:schemeClr val="bg1"/>
+                  </a:solidFill>
+                </a:rPr>
+                <a:t>意欲賞 受賞</a:t>
               </a:r>
               <a:endParaRPr kumimoji="1" lang="en-US" altLang="ja-JP" sz="3200" dirty="0">
                 <a:solidFill>
@@ -2947,13 +2980,13 @@
         </p:nvSpPr>
         <p:spPr>
           <a:xfrm>
-            <a:off x="3560950" y="1512766"/>
+            <a:off x="3763930" y="1407080"/>
             <a:ext cx="2225741" cy="1639788"/>
           </a:xfrm>
           <a:prstGeom prst="cloudCallout">
             <a:avLst>
-              <a:gd name="adj1" fmla="val -57057"/>
-              <a:gd name="adj2" fmla="val 56503"/>
+              <a:gd name="adj1" fmla="val -66989"/>
+              <a:gd name="adj2" fmla="val 73661"/>
             </a:avLst>
           </a:prstGeom>
           <a:noFill/>
@@ -3308,7 +3341,7 @@
                   <a:schemeClr val="bg1"/>
                 </a:solidFill>
               </a:rPr>
-              <a:t>・ ツール開発を通して</a:t>
+              <a:t>・ ツール開発やレンダリングを通して</a:t>
             </a:r>
             <a:r>
               <a:rPr lang="ja-JP" altLang="en-US" sz="2400" u="sng" dirty="0">
@@ -3316,7 +3349,7 @@
                   <a:srgbClr val="FF0000"/>
                 </a:solidFill>
               </a:rPr>
-              <a:t>チーム全体の生産性を高められる</a:t>
+              <a:t>チーム全体の生産性を</a:t>
             </a:r>
             <a:br>
               <a:rPr lang="en-US" altLang="ja-JP" sz="2400" u="sng" dirty="0">
@@ -3339,7 +3372,7 @@
                   <a:srgbClr val="FF0000"/>
                 </a:solidFill>
               </a:rPr>
-              <a:t>エンジニア</a:t>
+              <a:t>高められるエンジニア</a:t>
             </a:r>
             <a:r>
               <a:rPr lang="ja-JP" altLang="en-US" sz="2400" dirty="0">
@@ -3677,6 +3710,725 @@
         <p:cNvPr id="1" name="">
           <a:extLst>
             <a:ext uri="{FF2B5EF4-FFF2-40B4-BE49-F238E27FC236}">
+              <a16:creationId xmlns:a16="http://schemas.microsoft.com/office/drawing/2014/main" id="{36D1AAA5-5BE7-0C32-8585-2D6455742D59}"/>
+            </a:ext>
+          </a:extLst>
+        </p:cNvPr>
+        <p:cNvGrpSpPr/>
+        <p:nvPr/>
+      </p:nvGrpSpPr>
+      <p:grpSpPr>
+        <a:xfrm>
+          <a:off x="0" y="0"/>
+          <a:ext cx="0" cy="0"/>
+          <a:chOff x="0" y="0"/>
+          <a:chExt cx="0" cy="0"/>
+        </a:xfrm>
+      </p:grpSpPr>
+      <p:sp>
+        <p:nvSpPr>
+          <p:cNvPr id="2" name="タイトル 1">
+            <a:extLst>
+              <a:ext uri="{FF2B5EF4-FFF2-40B4-BE49-F238E27FC236}">
+                <a16:creationId xmlns:a16="http://schemas.microsoft.com/office/drawing/2014/main" id="{5B7BFE0B-7662-E699-ABDE-278003782171}"/>
+              </a:ext>
+            </a:extLst>
+          </p:cNvPr>
+          <p:cNvSpPr>
+            <a:spLocks noGrp="1"/>
+          </p:cNvSpPr>
+          <p:nvPr>
+            <p:ph type="title"/>
+          </p:nvPr>
+        </p:nvSpPr>
+        <p:spPr>
+          <a:xfrm>
+            <a:off x="371168" y="390833"/>
+            <a:ext cx="9992032" cy="923330"/>
+          </a:xfrm>
+        </p:spPr>
+        <p:txBody>
+          <a:bodyPr/>
+          <a:lstStyle/>
+          <a:p>
+            <a:r>
+              <a:rPr kumimoji="1" lang="ja-JP" altLang="en-US" sz="6000" dirty="0"/>
+              <a:t>制作作品</a:t>
+            </a:r>
+            <a:r>
+              <a:rPr kumimoji="1" lang="ja-JP" altLang="en-US" sz="6000" u="none" dirty="0"/>
+              <a:t> </a:t>
+            </a:r>
+            <a:r>
+              <a:rPr kumimoji="1" lang="ja-JP" altLang="en-US" sz="6000" dirty="0"/>
+              <a:t>個人制作作品①</a:t>
+            </a:r>
+          </a:p>
+        </p:txBody>
+      </p:sp>
+      <p:sp>
+        <p:nvSpPr>
+          <p:cNvPr id="5" name="テキスト ボックス 4">
+            <a:extLst>
+              <a:ext uri="{FF2B5EF4-FFF2-40B4-BE49-F238E27FC236}">
+                <a16:creationId xmlns:a16="http://schemas.microsoft.com/office/drawing/2014/main" id="{CDE31598-057C-B8BD-735C-601557676494}"/>
+              </a:ext>
+            </a:extLst>
+          </p:cNvPr>
+          <p:cNvSpPr txBox="1"/>
+          <p:nvPr/>
+        </p:nvSpPr>
+        <p:spPr>
+          <a:xfrm>
+            <a:off x="182818" y="1411601"/>
+            <a:ext cx="3070861" cy="584775"/>
+          </a:xfrm>
+          <a:prstGeom prst="rect">
+            <a:avLst/>
+          </a:prstGeom>
+          <a:noFill/>
+          <a:ln w="19050">
+            <a:noFill/>
+          </a:ln>
+        </p:spPr>
+        <p:txBody>
+          <a:bodyPr wrap="square" rtlCol="0">
+            <a:spAutoFit/>
+          </a:bodyPr>
+          <a:lstStyle/>
+          <a:p>
+            <a:pPr algn="l"/>
+            <a:r>
+              <a:rPr kumimoji="1" lang="ja-JP" altLang="en-US" sz="3200" b="1" u="sng" dirty="0">
+                <a:solidFill>
+                  <a:schemeClr val="bg1"/>
+                </a:solidFill>
+              </a:rPr>
+              <a:t>ジャンル</a:t>
+            </a:r>
+          </a:p>
+        </p:txBody>
+      </p:sp>
+      <p:sp>
+        <p:nvSpPr>
+          <p:cNvPr id="8" name="テキスト ボックス 7">
+            <a:extLst>
+              <a:ext uri="{FF2B5EF4-FFF2-40B4-BE49-F238E27FC236}">
+                <a16:creationId xmlns:a16="http://schemas.microsoft.com/office/drawing/2014/main" id="{9A6BD113-CF0B-AEA8-BBE3-6E3DDB8E182E}"/>
+              </a:ext>
+            </a:extLst>
+          </p:cNvPr>
+          <p:cNvSpPr txBox="1"/>
+          <p:nvPr/>
+        </p:nvSpPr>
+        <p:spPr>
+          <a:xfrm>
+            <a:off x="174426" y="2683955"/>
+            <a:ext cx="5343832" cy="1015663"/>
+          </a:xfrm>
+          <a:prstGeom prst="rect">
+            <a:avLst/>
+          </a:prstGeom>
+          <a:noFill/>
+          <a:ln w="19050">
+            <a:noFill/>
+          </a:ln>
+        </p:spPr>
+        <p:txBody>
+          <a:bodyPr wrap="square" rtlCol="0">
+            <a:spAutoFit/>
+          </a:bodyPr>
+          <a:lstStyle/>
+          <a:p>
+            <a:r>
+              <a:rPr kumimoji="1" lang="ja-JP" altLang="en-US" sz="2000" b="1" dirty="0">
+                <a:solidFill>
+                  <a:schemeClr val="bg1"/>
+                </a:solidFill>
+              </a:rPr>
+              <a:t>現在制作中の</a:t>
+            </a:r>
+            <a:br>
+              <a:rPr kumimoji="1" lang="en-US" altLang="ja-JP" sz="2000" b="1" dirty="0">
+                <a:solidFill>
+                  <a:schemeClr val="bg1"/>
+                </a:solidFill>
+              </a:rPr>
+            </a:br>
+            <a:r>
+              <a:rPr kumimoji="1" lang="ja-JP" altLang="en-US" sz="2000" b="1" dirty="0">
+                <a:solidFill>
+                  <a:schemeClr val="bg1"/>
+                </a:solidFill>
+              </a:rPr>
+              <a:t>複数のプラットフォームで動作・開発が</a:t>
+            </a:r>
+            <a:br>
+              <a:rPr kumimoji="1" lang="en-US" altLang="ja-JP" sz="2000" b="1" dirty="0">
+                <a:solidFill>
+                  <a:schemeClr val="bg1"/>
+                </a:solidFill>
+              </a:rPr>
+            </a:br>
+            <a:r>
+              <a:rPr kumimoji="1" lang="ja-JP" altLang="en-US" sz="2000" b="1" dirty="0">
+                <a:solidFill>
+                  <a:schemeClr val="bg1"/>
+                </a:solidFill>
+              </a:rPr>
+              <a:t>行えることを想定したフレームワーク</a:t>
+            </a:r>
+            <a:endParaRPr lang="ja-JP" altLang="ja-JP" sz="2400" dirty="0">
+              <a:solidFill>
+                <a:schemeClr val="bg1"/>
+              </a:solidFill>
+              <a:effectLst/>
+            </a:endParaRPr>
+          </a:p>
+        </p:txBody>
+      </p:sp>
+      <p:sp>
+        <p:nvSpPr>
+          <p:cNvPr id="9" name="テキスト ボックス 8">
+            <a:extLst>
+              <a:ext uri="{FF2B5EF4-FFF2-40B4-BE49-F238E27FC236}">
+                <a16:creationId xmlns:a16="http://schemas.microsoft.com/office/drawing/2014/main" id="{8E1E3A59-74E7-0C96-D6F7-0935D12CFD36}"/>
+              </a:ext>
+            </a:extLst>
+          </p:cNvPr>
+          <p:cNvSpPr txBox="1"/>
+          <p:nvPr/>
+        </p:nvSpPr>
+        <p:spPr>
+          <a:xfrm>
+            <a:off x="200404" y="2061862"/>
+            <a:ext cx="1094996" cy="584775"/>
+          </a:xfrm>
+          <a:prstGeom prst="rect">
+            <a:avLst/>
+          </a:prstGeom>
+          <a:noFill/>
+          <a:ln w="19050">
+            <a:noFill/>
+          </a:ln>
+        </p:spPr>
+        <p:txBody>
+          <a:bodyPr wrap="square" rtlCol="0">
+            <a:spAutoFit/>
+          </a:bodyPr>
+          <a:lstStyle/>
+          <a:p>
+            <a:pPr algn="l"/>
+            <a:r>
+              <a:rPr kumimoji="1" lang="ja-JP" altLang="en-US" sz="3200" b="1" u="sng" dirty="0">
+                <a:solidFill>
+                  <a:schemeClr val="bg1"/>
+                </a:solidFill>
+              </a:rPr>
+              <a:t>概要</a:t>
+            </a:r>
+          </a:p>
+        </p:txBody>
+      </p:sp>
+      <p:sp>
+        <p:nvSpPr>
+          <p:cNvPr id="10" name="テキスト ボックス 9">
+            <a:extLst>
+              <a:ext uri="{FF2B5EF4-FFF2-40B4-BE49-F238E27FC236}">
+                <a16:creationId xmlns:a16="http://schemas.microsoft.com/office/drawing/2014/main" id="{A78E0B85-5619-90A3-CFA3-EE25BBD18C47}"/>
+              </a:ext>
+            </a:extLst>
+          </p:cNvPr>
+          <p:cNvSpPr txBox="1"/>
+          <p:nvPr/>
+        </p:nvSpPr>
+        <p:spPr>
+          <a:xfrm>
+            <a:off x="174446" y="5410200"/>
+            <a:ext cx="5192738" cy="1323439"/>
+          </a:xfrm>
+          <a:prstGeom prst="rect">
+            <a:avLst/>
+          </a:prstGeom>
+          <a:noFill/>
+          <a:ln w="19050">
+            <a:noFill/>
+          </a:ln>
+        </p:spPr>
+        <p:txBody>
+          <a:bodyPr wrap="square" rtlCol="0">
+            <a:spAutoFit/>
+          </a:bodyPr>
+          <a:lstStyle/>
+          <a:p>
+            <a:pPr algn="l"/>
+            <a:r>
+              <a:rPr kumimoji="1" lang="ja-JP" altLang="en-US" sz="2000" dirty="0">
+                <a:solidFill>
+                  <a:schemeClr val="bg1"/>
+                </a:solidFill>
+              </a:rPr>
+              <a:t>・数学・文字列ライブラリ作成</a:t>
+            </a:r>
+            <a:endParaRPr kumimoji="1" lang="en-US" altLang="ja-JP" sz="2000" dirty="0">
+              <a:solidFill>
+                <a:schemeClr val="bg1"/>
+              </a:solidFill>
+            </a:endParaRPr>
+          </a:p>
+          <a:p>
+            <a:pPr algn="l"/>
+            <a:r>
+              <a:rPr kumimoji="1" lang="ja-JP" altLang="en-US" sz="2000" dirty="0">
+                <a:solidFill>
+                  <a:schemeClr val="bg1"/>
+                </a:solidFill>
+              </a:rPr>
+              <a:t>・</a:t>
+            </a:r>
+            <a:r>
+              <a:rPr kumimoji="1" lang="en-US" altLang="ja-JP" sz="2000" dirty="0">
+                <a:solidFill>
+                  <a:schemeClr val="bg1"/>
+                </a:solidFill>
+              </a:rPr>
+              <a:t>HLSL</a:t>
+            </a:r>
+            <a:r>
+              <a:rPr kumimoji="1" lang="ja-JP" altLang="en-US" sz="2000" dirty="0">
+                <a:solidFill>
+                  <a:schemeClr val="bg1"/>
+                </a:solidFill>
+              </a:rPr>
+              <a:t>を基準としたシェーダー作成</a:t>
+            </a:r>
+            <a:endParaRPr kumimoji="1" lang="en-US" altLang="ja-JP" sz="2000" dirty="0">
+              <a:solidFill>
+                <a:schemeClr val="bg1"/>
+              </a:solidFill>
+            </a:endParaRPr>
+          </a:p>
+          <a:p>
+            <a:pPr algn="l"/>
+            <a:r>
+              <a:rPr kumimoji="1" lang="ja-JP" altLang="en-US" sz="2000" dirty="0">
+                <a:solidFill>
+                  <a:schemeClr val="bg1"/>
+                </a:solidFill>
+              </a:rPr>
+              <a:t>・グラフィック</a:t>
+            </a:r>
+            <a:r>
+              <a:rPr kumimoji="1" lang="en-US" altLang="ja-JP" sz="2000" dirty="0">
+                <a:solidFill>
+                  <a:schemeClr val="bg1"/>
+                </a:solidFill>
+              </a:rPr>
+              <a:t>API</a:t>
+            </a:r>
+            <a:r>
+              <a:rPr kumimoji="1" lang="ja-JP" altLang="en-US" sz="2000" dirty="0">
+                <a:solidFill>
+                  <a:schemeClr val="bg1"/>
+                </a:solidFill>
+              </a:rPr>
+              <a:t>のインターフェイス作成</a:t>
+            </a:r>
+            <a:endParaRPr kumimoji="1" lang="en-US" altLang="ja-JP" sz="2000" dirty="0">
+              <a:solidFill>
+                <a:schemeClr val="bg1"/>
+              </a:solidFill>
+            </a:endParaRPr>
+          </a:p>
+          <a:p>
+            <a:pPr algn="l"/>
+            <a:r>
+              <a:rPr kumimoji="1" lang="ja-JP" altLang="en-US" sz="2000" dirty="0">
+                <a:solidFill>
+                  <a:schemeClr val="bg1"/>
+                </a:solidFill>
+              </a:rPr>
+              <a:t>・</a:t>
+            </a:r>
+            <a:r>
+              <a:rPr kumimoji="1" lang="en-US" altLang="ja-JP" sz="2000" dirty="0">
+                <a:solidFill>
+                  <a:schemeClr val="bg1"/>
+                </a:solidFill>
+              </a:rPr>
+              <a:t>API</a:t>
+            </a:r>
+            <a:r>
+              <a:rPr kumimoji="1" lang="ja-JP" altLang="en-US" sz="2000" dirty="0">
+                <a:solidFill>
+                  <a:schemeClr val="bg1"/>
+                </a:solidFill>
+              </a:rPr>
+              <a:t>オブジェクト管理マネージャー作成</a:t>
+            </a:r>
+            <a:endParaRPr kumimoji="1" lang="en-US" altLang="ja-JP" sz="2000" dirty="0">
+              <a:solidFill>
+                <a:schemeClr val="bg1"/>
+              </a:solidFill>
+            </a:endParaRPr>
+          </a:p>
+        </p:txBody>
+      </p:sp>
+      <p:sp>
+        <p:nvSpPr>
+          <p:cNvPr id="11" name="テキスト ボックス 10">
+            <a:extLst>
+              <a:ext uri="{FF2B5EF4-FFF2-40B4-BE49-F238E27FC236}">
+                <a16:creationId xmlns:a16="http://schemas.microsoft.com/office/drawing/2014/main" id="{42A99C6C-7F8F-1C7D-AC77-3ED7787A7725}"/>
+              </a:ext>
+            </a:extLst>
+          </p:cNvPr>
+          <p:cNvSpPr txBox="1"/>
+          <p:nvPr/>
+        </p:nvSpPr>
+        <p:spPr>
+          <a:xfrm>
+            <a:off x="182818" y="4827061"/>
+            <a:ext cx="2757687" cy="584775"/>
+          </a:xfrm>
+          <a:prstGeom prst="rect">
+            <a:avLst/>
+          </a:prstGeom>
+          <a:noFill/>
+          <a:ln w="19050">
+            <a:noFill/>
+          </a:ln>
+        </p:spPr>
+        <p:txBody>
+          <a:bodyPr wrap="square" rtlCol="0">
+            <a:spAutoFit/>
+          </a:bodyPr>
+          <a:lstStyle/>
+          <a:p>
+            <a:pPr algn="l"/>
+            <a:r>
+              <a:rPr kumimoji="1" lang="ja-JP" altLang="en-US" sz="3200" b="1" u="sng" dirty="0">
+                <a:solidFill>
+                  <a:schemeClr val="bg1"/>
+                </a:solidFill>
+              </a:rPr>
+              <a:t>主な制作内容</a:t>
+            </a:r>
+          </a:p>
+        </p:txBody>
+      </p:sp>
+      <p:sp>
+        <p:nvSpPr>
+          <p:cNvPr id="12" name="テキスト ボックス 11">
+            <a:extLst>
+              <a:ext uri="{FF2B5EF4-FFF2-40B4-BE49-F238E27FC236}">
+                <a16:creationId xmlns:a16="http://schemas.microsoft.com/office/drawing/2014/main" id="{E976FBE0-0CD0-1E70-543C-EBB72340D48B}"/>
+              </a:ext>
+            </a:extLst>
+          </p:cNvPr>
+          <p:cNvSpPr txBox="1"/>
+          <p:nvPr/>
+        </p:nvSpPr>
+        <p:spPr>
+          <a:xfrm>
+            <a:off x="2093655" y="1565107"/>
+            <a:ext cx="2179908" cy="400110"/>
+          </a:xfrm>
+          <a:prstGeom prst="rect">
+            <a:avLst/>
+          </a:prstGeom>
+          <a:noFill/>
+          <a:ln w="19050">
+            <a:noFill/>
+          </a:ln>
+        </p:spPr>
+        <p:txBody>
+          <a:bodyPr wrap="square" rtlCol="0">
+            <a:spAutoFit/>
+          </a:bodyPr>
+          <a:lstStyle/>
+          <a:p>
+            <a:r>
+              <a:rPr lang="ja-JP" altLang="en-US" sz="2000" dirty="0">
+                <a:solidFill>
+                  <a:schemeClr val="bg1"/>
+                </a:solidFill>
+                <a:effectLst/>
+              </a:rPr>
+              <a:t>フレームワーク</a:t>
+            </a:r>
+            <a:endParaRPr lang="ja-JP" altLang="ja-JP" sz="2000" dirty="0">
+              <a:solidFill>
+                <a:schemeClr val="bg1"/>
+              </a:solidFill>
+              <a:effectLst/>
+            </a:endParaRPr>
+          </a:p>
+        </p:txBody>
+      </p:sp>
+      <p:sp>
+        <p:nvSpPr>
+          <p:cNvPr id="3" name="テキスト ボックス 2">
+            <a:extLst>
+              <a:ext uri="{FF2B5EF4-FFF2-40B4-BE49-F238E27FC236}">
+                <a16:creationId xmlns:a16="http://schemas.microsoft.com/office/drawing/2014/main" id="{F3F5B5A9-3641-CD42-F740-DD03B7D71DBC}"/>
+              </a:ext>
+            </a:extLst>
+          </p:cNvPr>
+          <p:cNvSpPr txBox="1"/>
+          <p:nvPr/>
+        </p:nvSpPr>
+        <p:spPr>
+          <a:xfrm>
+            <a:off x="209614" y="4387197"/>
+            <a:ext cx="2053467" cy="400110"/>
+          </a:xfrm>
+          <a:prstGeom prst="rect">
+            <a:avLst/>
+          </a:prstGeom>
+          <a:noFill/>
+          <a:ln w="19050">
+            <a:noFill/>
+          </a:ln>
+        </p:spPr>
+        <p:txBody>
+          <a:bodyPr wrap="square" rtlCol="0">
+            <a:spAutoFit/>
+          </a:bodyPr>
+          <a:lstStyle/>
+          <a:p>
+            <a:r>
+              <a:rPr kumimoji="1" lang="ja-JP" altLang="en-US" sz="2000" b="1" dirty="0">
+                <a:solidFill>
+                  <a:schemeClr val="bg1"/>
+                </a:solidFill>
+              </a:rPr>
+              <a:t>約３カ月程度</a:t>
+            </a:r>
+            <a:endParaRPr lang="ja-JP" altLang="ja-JP" sz="2400" dirty="0">
+              <a:solidFill>
+                <a:schemeClr val="bg1"/>
+              </a:solidFill>
+              <a:effectLst/>
+            </a:endParaRPr>
+          </a:p>
+        </p:txBody>
+      </p:sp>
+      <p:sp>
+        <p:nvSpPr>
+          <p:cNvPr id="4" name="テキスト ボックス 3">
+            <a:extLst>
+              <a:ext uri="{FF2B5EF4-FFF2-40B4-BE49-F238E27FC236}">
+                <a16:creationId xmlns:a16="http://schemas.microsoft.com/office/drawing/2014/main" id="{3C0D4CBD-957E-952A-7B47-1B8DB79B1F25}"/>
+              </a:ext>
+            </a:extLst>
+          </p:cNvPr>
+          <p:cNvSpPr txBox="1"/>
+          <p:nvPr/>
+        </p:nvSpPr>
+        <p:spPr>
+          <a:xfrm>
+            <a:off x="166073" y="3729385"/>
+            <a:ext cx="2696998" cy="584775"/>
+          </a:xfrm>
+          <a:prstGeom prst="rect">
+            <a:avLst/>
+          </a:prstGeom>
+          <a:noFill/>
+          <a:ln w="19050">
+            <a:noFill/>
+          </a:ln>
+        </p:spPr>
+        <p:txBody>
+          <a:bodyPr wrap="square" rtlCol="0">
+            <a:spAutoFit/>
+          </a:bodyPr>
+          <a:lstStyle/>
+          <a:p>
+            <a:pPr algn="l"/>
+            <a:r>
+              <a:rPr kumimoji="1" lang="ja-JP" altLang="en-US" sz="3200" b="1" u="sng" dirty="0">
+                <a:solidFill>
+                  <a:schemeClr val="bg1"/>
+                </a:solidFill>
+              </a:rPr>
+              <a:t>稼働制作期間</a:t>
+            </a:r>
+          </a:p>
+        </p:txBody>
+      </p:sp>
+      <p:pic>
+        <p:nvPicPr>
+          <p:cNvPr id="13" name="図 12">
+            <a:extLst>
+              <a:ext uri="{FF2B5EF4-FFF2-40B4-BE49-F238E27FC236}">
+                <a16:creationId xmlns:a16="http://schemas.microsoft.com/office/drawing/2014/main" id="{D8A35707-79B0-D853-3604-53F74B643440}"/>
+              </a:ext>
+            </a:extLst>
+          </p:cNvPr>
+          <p:cNvPicPr>
+            <a:picLocks noChangeAspect="1"/>
+          </p:cNvPicPr>
+          <p:nvPr/>
+        </p:nvPicPr>
+        <p:blipFill>
+          <a:blip r:embed="rId2"/>
+          <a:stretch>
+            <a:fillRect/>
+          </a:stretch>
+        </p:blipFill>
+        <p:spPr>
+          <a:xfrm>
+            <a:off x="6705600" y="4278927"/>
+            <a:ext cx="5028813" cy="2262546"/>
+          </a:xfrm>
+          <a:prstGeom prst="rect">
+            <a:avLst/>
+          </a:prstGeom>
+        </p:spPr>
+      </p:pic>
+      <p:pic>
+        <p:nvPicPr>
+          <p:cNvPr id="15" name="図 14">
+            <a:extLst>
+              <a:ext uri="{FF2B5EF4-FFF2-40B4-BE49-F238E27FC236}">
+                <a16:creationId xmlns:a16="http://schemas.microsoft.com/office/drawing/2014/main" id="{2B0D6788-84C4-FDD2-4F72-09C9F260562D}"/>
+              </a:ext>
+            </a:extLst>
+          </p:cNvPr>
+          <p:cNvPicPr>
+            <a:picLocks noChangeAspect="1"/>
+          </p:cNvPicPr>
+          <p:nvPr/>
+        </p:nvPicPr>
+        <p:blipFill>
+          <a:blip r:embed="rId3"/>
+          <a:stretch>
+            <a:fillRect/>
+          </a:stretch>
+        </p:blipFill>
+        <p:spPr>
+          <a:xfrm>
+            <a:off x="5638800" y="1455119"/>
+            <a:ext cx="2347555" cy="2528816"/>
+          </a:xfrm>
+          <a:prstGeom prst="rect">
+            <a:avLst/>
+          </a:prstGeom>
+        </p:spPr>
+      </p:pic>
+      <p:pic>
+        <p:nvPicPr>
+          <p:cNvPr id="16" name="図 15" descr="テーブル&#10;&#10;AI 生成コンテンツは誤りを含む可能性があります。">
+            <a:extLst>
+              <a:ext uri="{FF2B5EF4-FFF2-40B4-BE49-F238E27FC236}">
+                <a16:creationId xmlns:a16="http://schemas.microsoft.com/office/drawing/2014/main" id="{31A33DA2-15B3-A75D-6334-F047D13234BD}"/>
+              </a:ext>
+            </a:extLst>
+          </p:cNvPr>
+          <p:cNvPicPr>
+            <a:picLocks noChangeAspect="1"/>
+          </p:cNvPicPr>
+          <p:nvPr/>
+        </p:nvPicPr>
+        <p:blipFill>
+          <a:blip r:embed="rId4"/>
+          <a:srcRect r="72887"/>
+          <a:stretch>
+            <a:fillRect/>
+          </a:stretch>
+        </p:blipFill>
+        <p:spPr>
+          <a:xfrm>
+            <a:off x="9583882" y="1744576"/>
+            <a:ext cx="1219200" cy="1997249"/>
+          </a:xfrm>
+          <a:prstGeom prst="rect">
+            <a:avLst/>
+          </a:prstGeom>
+        </p:spPr>
+      </p:pic>
+      <p:pic>
+        <p:nvPicPr>
+          <p:cNvPr id="20" name="図 19">
+            <a:extLst>
+              <a:ext uri="{FF2B5EF4-FFF2-40B4-BE49-F238E27FC236}">
+                <a16:creationId xmlns:a16="http://schemas.microsoft.com/office/drawing/2014/main" id="{7764E7A4-B15C-6C49-A69A-FEC6FACE47CD}"/>
+              </a:ext>
+            </a:extLst>
+          </p:cNvPr>
+          <p:cNvPicPr>
+            <a:picLocks noChangeAspect="1"/>
+          </p:cNvPicPr>
+          <p:nvPr/>
+        </p:nvPicPr>
+        <p:blipFill>
+          <a:blip r:embed="rId5"/>
+          <a:stretch>
+            <a:fillRect/>
+          </a:stretch>
+        </p:blipFill>
+        <p:spPr>
+          <a:xfrm>
+            <a:off x="8404578" y="1754624"/>
+            <a:ext cx="1208213" cy="1997249"/>
+          </a:xfrm>
+          <a:prstGeom prst="rect">
+            <a:avLst/>
+          </a:prstGeom>
+        </p:spPr>
+      </p:pic>
+      <p:pic>
+        <p:nvPicPr>
+          <p:cNvPr id="22" name="図 21">
+            <a:extLst>
+              <a:ext uri="{FF2B5EF4-FFF2-40B4-BE49-F238E27FC236}">
+                <a16:creationId xmlns:a16="http://schemas.microsoft.com/office/drawing/2014/main" id="{AFE74969-9AA3-01AC-4347-0936C7727302}"/>
+              </a:ext>
+            </a:extLst>
+          </p:cNvPr>
+          <p:cNvPicPr>
+            <a:picLocks noChangeAspect="1"/>
+          </p:cNvPicPr>
+          <p:nvPr/>
+        </p:nvPicPr>
+        <p:blipFill>
+          <a:blip r:embed="rId6"/>
+          <a:stretch>
+            <a:fillRect/>
+          </a:stretch>
+        </p:blipFill>
+        <p:spPr>
+          <a:xfrm>
+            <a:off x="10762084" y="1704509"/>
+            <a:ext cx="1220302" cy="2058121"/>
+          </a:xfrm>
+          <a:prstGeom prst="rect">
+            <a:avLst/>
+          </a:prstGeom>
+        </p:spPr>
+      </p:pic>
+    </p:spTree>
+    <p:extLst>
+      <p:ext uri="{BB962C8B-B14F-4D97-AF65-F5344CB8AC3E}">
+        <p14:creationId xmlns:p14="http://schemas.microsoft.com/office/powerpoint/2010/main" val="3318600825"/>
+      </p:ext>
+    </p:extLst>
+  </p:cSld>
+  <p:clrMapOvr>
+    <a:masterClrMapping/>
+  </p:clrMapOvr>
+</p:sld>
+</file>
+
+<file path=ppt/slides/slide6.xml><?xml version="1.0" encoding="utf-8"?>
+<p:sld xmlns:a="http://schemas.openxmlformats.org/drawingml/2006/main" xmlns:r="http://schemas.openxmlformats.org/officeDocument/2006/relationships" xmlns:p="http://schemas.openxmlformats.org/presentationml/2006/main">
+  <p:cSld>
+    <p:spTree>
+      <p:nvGrpSpPr>
+        <p:cNvPr id="1" name="">
+          <a:extLst>
+            <a:ext uri="{FF2B5EF4-FFF2-40B4-BE49-F238E27FC236}">
               <a16:creationId xmlns:a16="http://schemas.microsoft.com/office/drawing/2014/main" id="{39AD54F2-5412-F8A6-C31D-E1DAF632D890}"/>
             </a:ext>
           </a:extLst>
@@ -3867,7 +4619,7 @@
                   <a:schemeClr val="bg1"/>
                 </a:solidFill>
               </a:rPr>
-              <a:t>開始点と終了点をすべて結ぶゲームです。</a:t>
+              <a:t>開始点と終了点をオブジェクトで結ぶゲームです。</a:t>
             </a:r>
             <a:endParaRPr kumimoji="1" lang="en-US" altLang="ja-JP" sz="2000" dirty="0">
               <a:solidFill>
@@ -4387,7 +5139,7 @@
 </p:sld>
 </file>
 
-<file path=ppt/slides/slide6.xml><?xml version="1.0" encoding="utf-8"?>
+<file path=ppt/slides/slide7.xml><?xml version="1.0" encoding="utf-8"?>
 <p:sld xmlns:a="http://schemas.openxmlformats.org/drawingml/2006/main" xmlns:r="http://schemas.openxmlformats.org/officeDocument/2006/relationships" xmlns:p="http://schemas.openxmlformats.org/presentationml/2006/main">
   <p:cSld>
     <p:spTree>
@@ -4788,7 +5540,7 @@
 </p:sld>
 </file>
 
-<file path=ppt/slides/slide7.xml><?xml version="1.0" encoding="utf-8"?>
+<file path=ppt/slides/slide8.xml><?xml version="1.0" encoding="utf-8"?>
 <p:sld xmlns:a="http://schemas.openxmlformats.org/drawingml/2006/main" xmlns:r="http://schemas.openxmlformats.org/officeDocument/2006/relationships" xmlns:p="http://schemas.openxmlformats.org/presentationml/2006/main">
   <p:cSld>
     <p:spTree>

--- a/0_PR/01_ポートフォリオ.pptx
+++ b/0_PR/01_ポートフォリオ.pptx
@@ -3341,7 +3341,7 @@
                   <a:schemeClr val="bg1"/>
                 </a:solidFill>
               </a:rPr>
-              <a:t>・ ツール開発やレンダリングを通して</a:t>
+              <a:t>・ ツール開発やレンダリング技術を通して、</a:t>
             </a:r>
             <a:r>
               <a:rPr lang="ja-JP" altLang="en-US" sz="2400" u="sng" dirty="0">
@@ -3349,7 +3349,7 @@
                   <a:srgbClr val="FF0000"/>
                 </a:solidFill>
               </a:rPr>
-              <a:t>チーム全体の生産性を</a:t>
+              <a:t>より良いゲーム体験の</a:t>
             </a:r>
             <a:br>
               <a:rPr lang="en-US" altLang="ja-JP" sz="2400" u="sng" dirty="0">
@@ -3372,7 +3372,7 @@
                   <a:srgbClr val="FF0000"/>
                 </a:solidFill>
               </a:rPr>
-              <a:t>高められるエンジニア</a:t>
+              <a:t>実現に貢献できるエンジニア</a:t>
             </a:r>
             <a:r>
               <a:rPr lang="ja-JP" altLang="en-US" sz="2400" dirty="0">
@@ -3395,38 +3395,23 @@
                   <a:schemeClr val="bg1"/>
                 </a:solidFill>
               </a:rPr>
-              <a:t>・ 将来的には、サーバーなどの知識も習得し、分野を越えて</a:t>
-            </a:r>
-            <a:br>
-              <a:rPr lang="en-US" altLang="ja-JP" sz="2400" dirty="0">
-                <a:solidFill>
-                  <a:schemeClr val="bg1"/>
-                </a:solidFill>
-              </a:rPr>
-            </a:br>
+              <a:t>・ 将来的にはサーバーなどの知識も習得し、開発全体を理解する</a:t>
+            </a:r>
+            <a:endParaRPr lang="en-US" altLang="ja-JP" sz="2400" dirty="0">
+              <a:solidFill>
+                <a:schemeClr val="bg1"/>
+              </a:solidFill>
+            </a:endParaRPr>
+          </a:p>
+          <a:p>
+            <a:pPr algn="l"/>
             <a:r>
               <a:rPr lang="ja-JP" altLang="en-US" sz="2400" dirty="0">
                 <a:solidFill>
                   <a:schemeClr val="bg1"/>
                 </a:solidFill>
               </a:rPr>
-              <a:t>　 </a:t>
-            </a:r>
-            <a:r>
-              <a:rPr lang="ja-JP" altLang="en-US" sz="2400" u="sng" dirty="0">
-                <a:solidFill>
-                  <a:srgbClr val="FF0000"/>
-                </a:solidFill>
-              </a:rPr>
-              <a:t>多くの人をつなげられるエンジニア</a:t>
-            </a:r>
-            <a:r>
-              <a:rPr lang="ja-JP" altLang="en-US" sz="2400" dirty="0">
-                <a:solidFill>
-                  <a:schemeClr val="bg1"/>
-                </a:solidFill>
-              </a:rPr>
-              <a:t>になりたいと考えています。</a:t>
+              <a:t>　 ことで、提案ができるエンジニアになりたいと考えています。</a:t>
             </a:r>
             <a:endParaRPr kumimoji="1" lang="ja-JP" altLang="en-US" sz="2400" dirty="0">
               <a:solidFill>

--- a/0_PR/01_ポートフォリオ.pptx
+++ b/0_PR/01_ポートフォリオ.pptx
@@ -3411,7 +3411,23 @@
                   <a:schemeClr val="bg1"/>
                 </a:solidFill>
               </a:rPr>
-              <a:t>　 ことで、提案ができるエンジニアになりたいと考えています。</a:t>
+              <a:t>　 ことで、</a:t>
+            </a:r>
+            <a:r>
+              <a:rPr lang="ja-JP" altLang="en-US" sz="2400" u="sng" dirty="0">
+                <a:solidFill>
+                  <a:srgbClr val="FF0000"/>
+                </a:solidFill>
+              </a:rPr>
+              <a:t>提案ができるエンジニア</a:t>
+            </a:r>
+            <a:r>
+              <a:rPr lang="ja-JP" altLang="en-US" sz="2400" dirty="0">
+                <a:solidFill>
+                  <a:schemeClr val="bg1"/>
+                </a:solidFill>
+              </a:rPr>
+              <a:t>になりたいと考えています。</a:t>
             </a:r>
             <a:endParaRPr kumimoji="1" lang="ja-JP" altLang="en-US" sz="2400" dirty="0">
               <a:solidFill>
